--- a/figures/results_pbi2/low_disorder/low_disorder.pptx
+++ b/figures/results_pbi2/low_disorder/low_disorder.pptx
@@ -104,13 +104,18 @@
       </a:defRPr>
     </a:lvl9pPr>
   </p:defaultTextStyle>
+  <p:extLst>
+    <p:ext uri="{EFAFB233-063F-42B5-8137-9DF3F51BA10A}">
+      <p15:sldGuideLst xmlns:p15="http://schemas.microsoft.com/office/powerpoint/2012/main"/>
+    </p:ext>
+  </p:extLst>
 </p:presentation>
 </file>
 
 <file path=ppt/revisionInfo.xml><?xml version="1.0" encoding="utf-8"?>
 <p1510:revInfo xmlns:a="http://schemas.openxmlformats.org/drawingml/2006/main" xmlns:r="http://schemas.openxmlformats.org/officeDocument/2006/relationships" xmlns:p1510="http://schemas.microsoft.com/office/powerpoint/2015/10/main">
   <p1510:revLst>
-    <p1510:client id="{2148D9C4-7E4F-4301-A484-F7FEA1092574}" v="1" dt="2026-05-22T16:24:56.672"/>
+    <p1510:client id="{2148D9C4-7E4F-4301-A484-F7FEA1092574}" v="4" dt="2026-05-26T15:22:13.418"/>
   </p1510:revLst>
 </p1510:revInfo>
 </file>
@@ -120,46 +125,54 @@
   <pc:docChgLst>
     <pc:chgData name="David Beckwitt" userId="bdca50846bee3b35" providerId="LiveId" clId="{77C57F99-3B40-463A-9855-34DA2A8048A2}"/>
     <pc:docChg chg="undo custSel addSld modSld">
-      <pc:chgData name="David Beckwitt" userId="bdca50846bee3b35" providerId="LiveId" clId="{77C57F99-3B40-463A-9855-34DA2A8048A2}" dt="2026-05-22T16:25:31.288" v="34" actId="1036"/>
+      <pc:chgData name="David Beckwitt" userId="bdca50846bee3b35" providerId="LiveId" clId="{77C57F99-3B40-463A-9855-34DA2A8048A2}" dt="2026-05-26T15:22:31.189" v="57" actId="1076"/>
       <pc:docMkLst>
         <pc:docMk/>
       </pc:docMkLst>
       <pc:sldChg chg="addSp delSp modSp new mod">
-        <pc:chgData name="David Beckwitt" userId="bdca50846bee3b35" providerId="LiveId" clId="{77C57F99-3B40-463A-9855-34DA2A8048A2}" dt="2026-05-22T16:25:31.288" v="34" actId="1036"/>
+        <pc:chgData name="David Beckwitt" userId="bdca50846bee3b35" providerId="LiveId" clId="{77C57F99-3B40-463A-9855-34DA2A8048A2}" dt="2026-05-26T15:22:31.189" v="57" actId="1076"/>
         <pc:sldMkLst>
           <pc:docMk/>
           <pc:sldMk cId="3112000658" sldId="256"/>
         </pc:sldMkLst>
-        <pc:spChg chg="del">
-          <ac:chgData name="David Beckwitt" userId="bdca50846bee3b35" providerId="LiveId" clId="{77C57F99-3B40-463A-9855-34DA2A8048A2}" dt="2026-05-22T16:24:38.894" v="1" actId="478"/>
-          <ac:spMkLst>
-            <pc:docMk/>
-            <pc:sldMk cId="3112000658" sldId="256"/>
-            <ac:spMk id="2" creationId="{EEBC4005-AE91-1EFD-D6FE-5C698D0DA3D3}"/>
-          </ac:spMkLst>
-        </pc:spChg>
-        <pc:spChg chg="del">
-          <ac:chgData name="David Beckwitt" userId="bdca50846bee3b35" providerId="LiveId" clId="{77C57F99-3B40-463A-9855-34DA2A8048A2}" dt="2026-05-22T16:24:38.894" v="1" actId="478"/>
-          <ac:spMkLst>
-            <pc:docMk/>
-            <pc:sldMk cId="3112000658" sldId="256"/>
-            <ac:spMk id="3" creationId="{FB56419A-E18D-182B-F516-F44A7D320646}"/>
-          </ac:spMkLst>
-        </pc:spChg>
         <pc:spChg chg="add mod">
-          <ac:chgData name="David Beckwitt" userId="bdca50846bee3b35" providerId="LiveId" clId="{77C57F99-3B40-463A-9855-34DA2A8048A2}" dt="2026-05-22T16:25:31.288" v="34" actId="1036"/>
+          <ac:chgData name="David Beckwitt" userId="bdca50846bee3b35" providerId="LiveId" clId="{77C57F99-3B40-463A-9855-34DA2A8048A2}" dt="2026-05-26T15:22:31.189" v="57" actId="1076"/>
           <ac:spMkLst>
             <pc:docMk/>
             <pc:sldMk cId="3112000658" sldId="256"/>
             <ac:spMk id="6" creationId="{1D173B0E-2BDB-43DF-7B7D-95E448C69EFB}"/>
           </ac:spMkLst>
         </pc:spChg>
+        <pc:picChg chg="add del mod modCrop">
+          <ac:chgData name="David Beckwitt" userId="bdca50846bee3b35" providerId="LiveId" clId="{77C57F99-3B40-463A-9855-34DA2A8048A2}" dt="2026-05-26T15:22:10.002" v="50" actId="21"/>
+          <ac:picMkLst>
+            <pc:docMk/>
+            <pc:sldMk cId="3112000658" sldId="256"/>
+            <ac:picMk id="3" creationId="{F6E4228F-06FD-2832-3686-245E91EF71D6}"/>
+          </ac:picMkLst>
+        </pc:picChg>
         <pc:picChg chg="add mod">
-          <ac:chgData name="David Beckwitt" userId="bdca50846bee3b35" providerId="LiveId" clId="{77C57F99-3B40-463A-9855-34DA2A8048A2}" dt="2026-05-22T16:25:26.144" v="29" actId="1076"/>
+          <ac:chgData name="David Beckwitt" userId="bdca50846bee3b35" providerId="LiveId" clId="{77C57F99-3B40-463A-9855-34DA2A8048A2}" dt="2026-05-26T15:22:11.519" v="52"/>
+          <ac:picMkLst>
+            <pc:docMk/>
+            <pc:sldMk cId="3112000658" sldId="256"/>
+            <ac:picMk id="4" creationId="{F6E4228F-06FD-2832-3686-245E91EF71D6}"/>
+          </ac:picMkLst>
+        </pc:picChg>
+        <pc:picChg chg="add del mod">
+          <ac:chgData name="David Beckwitt" userId="bdca50846bee3b35" providerId="LiveId" clId="{77C57F99-3B40-463A-9855-34DA2A8048A2}" dt="2026-05-26T15:22:11.297" v="51" actId="478"/>
           <ac:picMkLst>
             <pc:docMk/>
             <pc:sldMk cId="3112000658" sldId="256"/>
             <ac:picMk id="5" creationId="{10DF3122-F670-D086-39B4-33133F9C258A}"/>
+          </ac:picMkLst>
+        </pc:picChg>
+        <pc:picChg chg="add mod ord modCrop">
+          <ac:chgData name="David Beckwitt" userId="bdca50846bee3b35" providerId="LiveId" clId="{77C57F99-3B40-463A-9855-34DA2A8048A2}" dt="2026-05-26T15:22:28.298" v="56" actId="732"/>
+          <ac:picMkLst>
+            <pc:docMk/>
+            <pc:sldMk cId="3112000658" sldId="256"/>
+            <ac:picMk id="7" creationId="{A34F4137-C716-77A8-8A82-B584BC3CF13C}"/>
           </ac:picMkLst>
         </pc:picChg>
       </pc:sldChg>
@@ -315,7 +328,7 @@
           <a:p>
             <a:fld id="{1B24D2E2-0A23-477A-B984-9998A2B0D918}" type="datetimeFigureOut">
               <a:rPr lang="en-US" smtClean="0"/>
-              <a:t>5/22/2026</a:t>
+              <a:t>5/26/2026</a:t>
             </a:fld>
             <a:endParaRPr lang="en-US"/>
           </a:p>
@@ -513,7 +526,7 @@
           <a:p>
             <a:fld id="{1B24D2E2-0A23-477A-B984-9998A2B0D918}" type="datetimeFigureOut">
               <a:rPr lang="en-US" smtClean="0"/>
-              <a:t>5/22/2026</a:t>
+              <a:t>5/26/2026</a:t>
             </a:fld>
             <a:endParaRPr lang="en-US"/>
           </a:p>
@@ -721,7 +734,7 @@
           <a:p>
             <a:fld id="{1B24D2E2-0A23-477A-B984-9998A2B0D918}" type="datetimeFigureOut">
               <a:rPr lang="en-US" smtClean="0"/>
-              <a:t>5/22/2026</a:t>
+              <a:t>5/26/2026</a:t>
             </a:fld>
             <a:endParaRPr lang="en-US"/>
           </a:p>
@@ -919,7 +932,7 @@
           <a:p>
             <a:fld id="{1B24D2E2-0A23-477A-B984-9998A2B0D918}" type="datetimeFigureOut">
               <a:rPr lang="en-US" smtClean="0"/>
-              <a:t>5/22/2026</a:t>
+              <a:t>5/26/2026</a:t>
             </a:fld>
             <a:endParaRPr lang="en-US"/>
           </a:p>
@@ -1194,7 +1207,7 @@
           <a:p>
             <a:fld id="{1B24D2E2-0A23-477A-B984-9998A2B0D918}" type="datetimeFigureOut">
               <a:rPr lang="en-US" smtClean="0"/>
-              <a:t>5/22/2026</a:t>
+              <a:t>5/26/2026</a:t>
             </a:fld>
             <a:endParaRPr lang="en-US"/>
           </a:p>
@@ -1459,7 +1472,7 @@
           <a:p>
             <a:fld id="{1B24D2E2-0A23-477A-B984-9998A2B0D918}" type="datetimeFigureOut">
               <a:rPr lang="en-US" smtClean="0"/>
-              <a:t>5/22/2026</a:t>
+              <a:t>5/26/2026</a:t>
             </a:fld>
             <a:endParaRPr lang="en-US"/>
           </a:p>
@@ -1871,7 +1884,7 @@
           <a:p>
             <a:fld id="{1B24D2E2-0A23-477A-B984-9998A2B0D918}" type="datetimeFigureOut">
               <a:rPr lang="en-US" smtClean="0"/>
-              <a:t>5/22/2026</a:t>
+              <a:t>5/26/2026</a:t>
             </a:fld>
             <a:endParaRPr lang="en-US"/>
           </a:p>
@@ -2012,7 +2025,7 @@
           <a:p>
             <a:fld id="{1B24D2E2-0A23-477A-B984-9998A2B0D918}" type="datetimeFigureOut">
               <a:rPr lang="en-US" smtClean="0"/>
-              <a:t>5/22/2026</a:t>
+              <a:t>5/26/2026</a:t>
             </a:fld>
             <a:endParaRPr lang="en-US"/>
           </a:p>
@@ -2125,7 +2138,7 @@
           <a:p>
             <a:fld id="{1B24D2E2-0A23-477A-B984-9998A2B0D918}" type="datetimeFigureOut">
               <a:rPr lang="en-US" smtClean="0"/>
-              <a:t>5/22/2026</a:t>
+              <a:t>5/26/2026</a:t>
             </a:fld>
             <a:endParaRPr lang="en-US"/>
           </a:p>
@@ -2436,7 +2449,7 @@
           <a:p>
             <a:fld id="{1B24D2E2-0A23-477A-B984-9998A2B0D918}" type="datetimeFigureOut">
               <a:rPr lang="en-US" smtClean="0"/>
-              <a:t>5/22/2026</a:t>
+              <a:t>5/26/2026</a:t>
             </a:fld>
             <a:endParaRPr lang="en-US"/>
           </a:p>
@@ -2724,7 +2737,7 @@
           <a:p>
             <a:fld id="{1B24D2E2-0A23-477A-B984-9998A2B0D918}" type="datetimeFigureOut">
               <a:rPr lang="en-US" smtClean="0"/>
-              <a:t>5/22/2026</a:t>
+              <a:t>5/26/2026</a:t>
             </a:fld>
             <a:endParaRPr lang="en-US"/>
           </a:p>
@@ -2965,7 +2978,7 @@
           <a:p>
             <a:fld id="{1B24D2E2-0A23-477A-B984-9998A2B0D918}" type="datetimeFigureOut">
               <a:rPr lang="en-US" smtClean="0"/>
-              <a:t>5/22/2026</a:t>
+              <a:t>5/26/2026</a:t>
             </a:fld>
             <a:endParaRPr lang="en-US"/>
           </a:p>
@@ -3384,10 +3397,10 @@
       </p:grpSpPr>
       <p:pic>
         <p:nvPicPr>
-          <p:cNvPr id="5" name="Picture 4">
-            <a:extLst>
-              <a:ext uri="{FF2B5EF4-FFF2-40B4-BE49-F238E27FC236}">
-                <a16:creationId xmlns:a16="http://schemas.microsoft.com/office/drawing/2014/main" id="{10DF3122-F670-D086-39B4-33133F9C258A}"/>
+          <p:cNvPr id="7" name="Picture 6">
+            <a:extLst>
+              <a:ext uri="{FF2B5EF4-FFF2-40B4-BE49-F238E27FC236}">
+                <a16:creationId xmlns:a16="http://schemas.microsoft.com/office/drawing/2014/main" id="{A34F4137-C716-77A8-8A82-B584BC3CF13C}"/>
               </a:ext>
             </a:extLst>
           </p:cNvPr>
@@ -3404,14 +3417,15 @@
               </a:ext>
             </a:extLst>
           </a:blip>
+          <a:srcRect l="18477" t="2183" r="21879" b="8223"/>
           <a:stretch>
             <a:fillRect/>
           </a:stretch>
         </p:blipFill>
         <p:spPr>
           <a:xfrm>
-            <a:off x="4267428" y="2057571"/>
-            <a:ext cx="3657143" cy="2742857"/>
+            <a:off x="4270074" y="2076621"/>
+            <a:ext cx="3795781" cy="2941149"/>
           </a:xfrm>
           <a:prstGeom prst="rect">
             <a:avLst/>
@@ -3432,7 +3446,7 @@
         </p:nvSpPr>
         <p:spPr>
           <a:xfrm>
-            <a:off x="5349641" y="2076621"/>
+            <a:off x="5349642" y="2283655"/>
             <a:ext cx="1492716" cy="369332"/>
           </a:xfrm>
           <a:prstGeom prst="rect">
